--- a/docs/content/one_way_anova/one_way_anova_lecture.pptx
+++ b/docs/content/one_way_anova/one_way_anova_lecture.pptx
@@ -3362,7 +3362,7 @@
             </a:pPr>
             <a:r>
               <a:rPr/>
-              <a:t>2026-09-04</a:t>
+              <a:t>2026-09-08</a:t>
             </a:r>
           </a:p>
         </p:txBody>

--- a/docs/content/one_way_anova/one_way_anova_lecture.pptx
+++ b/docs/content/one_way_anova/one_way_anova_lecture.pptx
@@ -3362,7 +3362,7 @@
             </a:pPr>
             <a:r>
               <a:rPr/>
-              <a:t>2026-09-08</a:t>
+              <a:t>2026-09-10</a:t>
             </a:r>
           </a:p>
         </p:txBody>

--- a/docs/content/one_way_anova/one_way_anova_lecture.pptx
+++ b/docs/content/one_way_anova/one_way_anova_lecture.pptx
@@ -3362,7 +3362,7 @@
             </a:pPr>
             <a:r>
               <a:rPr/>
-              <a:t>2026-09-10</a:t>
+              <a:t>2026-09-14</a:t>
             </a:r>
           </a:p>
         </p:txBody>

--- a/docs/content/one_way_anova/one_way_anova_lecture.pptx
+++ b/docs/content/one_way_anova/one_way_anova_lecture.pptx
@@ -3362,7 +3362,7 @@
             </a:pPr>
             <a:r>
               <a:rPr/>
-              <a:t>2026-09-14</a:t>
+              <a:t>2026-09-21</a:t>
             </a:r>
           </a:p>
         </p:txBody>

--- a/docs/content/one_way_anova/one_way_anova_lecture.pptx
+++ b/docs/content/one_way_anova/one_way_anova_lecture.pptx
@@ -3362,7 +3362,7 @@
             </a:pPr>
             <a:r>
               <a:rPr/>
-              <a:t>2026-09-21</a:t>
+              <a:t>2026-09-22</a:t>
             </a:r>
           </a:p>
         </p:txBody>

--- a/docs/content/one_way_anova/one_way_anova_lecture.pptx
+++ b/docs/content/one_way_anova/one_way_anova_lecture.pptx
@@ -3362,7 +3362,7 @@
             </a:pPr>
             <a:r>
               <a:rPr/>
-              <a:t>2026-09-22</a:t>
+              <a:t>2026-09-23</a:t>
             </a:r>
           </a:p>
         </p:txBody>

--- a/docs/content/one_way_anova/one_way_anova_lecture.pptx
+++ b/docs/content/one_way_anova/one_way_anova_lecture.pptx
@@ -4798,7 +4798,17 @@
                 </a:solidFill>
                 <a:latin typeface="Courier"/>
               </a:rPr>
-              <a:t>(species, body_mass_g, </a:t>
+              <a:t>(species, body_mass_g,</a:t>
+            </a:r>
+            <a:br/>
+            <a:r>
+              <a:rPr>
+                <a:solidFill>
+                  <a:srgbClr val="003B4F"/>
+                </a:solidFill>
+                <a:latin typeface="Courier"/>
+              </a:rPr>
+              <a:t>                               </a:t>
             </a:r>
             <a:r>
               <a:rPr>
@@ -5107,7 +5117,17 @@
                 </a:solidFill>
                 <a:latin typeface="Courier"/>
               </a:rPr>
-              <a:t>, </a:t>
+              <a:t>,</a:t>
+            </a:r>
+            <a:br/>
+            <a:r>
+              <a:rPr>
+                <a:solidFill>
+                  <a:srgbClr val="003B4F"/>
+                </a:solidFill>
+                <a:latin typeface="Courier"/>
+              </a:rPr>
+              <a:t>       </a:t>
             </a:r>
             <a:r>
               <a:rPr>

--- a/docs/content/one_way_anova/one_way_anova_lecture.pptx
+++ b/docs/content/one_way_anova/one_way_anova_lecture.pptx
@@ -3362,7 +3362,7 @@
             </a:pPr>
             <a:r>
               <a:rPr/>
-              <a:t>2026-09-23</a:t>
+              <a:t>2026-09-24</a:t>
             </a:r>
           </a:p>
         </p:txBody>

--- a/docs/content/one_way_anova/one_way_anova_lecture.pptx
+++ b/docs/content/one_way_anova/one_way_anova_lecture.pptx
@@ -3362,7 +3362,7 @@
             </a:pPr>
             <a:r>
               <a:rPr/>
-              <a:t>2026-09-24</a:t>
+              <a:t>2026-09-29</a:t>
             </a:r>
           </a:p>
         </p:txBody>

--- a/docs/content/one_way_anova/one_way_anova_lecture.pptx
+++ b/docs/content/one_way_anova/one_way_anova_lecture.pptx
@@ -3362,7 +3362,7 @@
             </a:pPr>
             <a:r>
               <a:rPr/>
-              <a:t>2026-09-29</a:t>
+              <a:t>2026-10-01</a:t>
             </a:r>
           </a:p>
         </p:txBody>

--- a/docs/content/one_way_anova/one_way_anova_lecture.pptx
+++ b/docs/content/one_way_anova/one_way_anova_lecture.pptx
@@ -28,6 +28,7 @@
     <p:sldId id="276" r:id="rId22"/>
     <p:sldId id="277" r:id="rId23"/>
     <p:sldId id="278" r:id="rId24"/>
+    <p:sldId id="279" r:id="rId25"/>
   </p:sldIdLst>
   <p:sldSz cx="9144000" cy="5143500" type="screen16x9"/>
   <p:notesSz cx="6858000" cy="9144000"/>
@@ -3362,7 +3363,7 @@
             </a:pPr>
             <a:r>
               <a:rPr/>
-              <a:t>2026-10-01</a:t>
+              <a:t>2026-10-05</a:t>
             </a:r>
           </a:p>
         </p:txBody>
@@ -3452,7 +3453,7 @@
             </a:r>
             <a:r>
               <a:rPr sz="2000"/>
-              <a:t> Before the plot renders — do you expect all three species to differ, or just one? Which species do you think is heaviest?</a:t>
+              <a:t> Do you expect all three species to differ, or just one? Which is heaviest?</a:t>
             </a:r>
           </a:p>
         </p:txBody>
@@ -4211,8 +4212,8 @@
         </p:blipFill>
         <p:spPr bwMode="auto">
           <a:xfrm>
-            <a:off x="127000" y="1562100"/>
-            <a:ext cx="4432300" cy="2730500"/>
+            <a:off x="127000" y="2070100"/>
+            <a:ext cx="4432300" cy="1701800"/>
           </a:xfrm>
           <a:prstGeom prst="rect">
             <a:avLst/>
@@ -6439,7 +6440,7 @@
             </a:r>
             <a:r>
               <a:rPr sz="2000"/>
-              <a:t> gives the same four panels you saw in the regression lecture. With ~340 penguins instead of 118 near-perfect paper squares, do you expect the Normal Q-Q panel to track the line as tightly?</a:t>
+              <a:t> gives the same four panels as the regression lecture. With ~340 penguins, will the Normal Q-Q panel track the line as tightly?</a:t>
             </a:r>
           </a:p>
         </p:txBody>
@@ -6491,7 +6492,7 @@
                 </a:solidFill>
                 <a:latin typeface="Courier"/>
               </a:rPr>
-              <a:t># Same plot(model) diagnostics as Lecture 11's regression</a:t>
+              <a:t># Same plot(model) diagnostics as the regression lecture</a:t>
             </a:r>
             <a:br/>
             <a:r>
@@ -6622,8 +6623,8 @@
         </p:blipFill>
         <p:spPr bwMode="auto">
           <a:xfrm>
-            <a:off x="685800" y="1270000"/>
-            <a:ext cx="3302000" cy="3302000"/>
+            <a:off x="177800" y="1270000"/>
+            <a:ext cx="4318000" cy="3302000"/>
           </a:xfrm>
           <a:prstGeom prst="rect">
             <a:avLst/>
@@ -6638,77 +6639,6 @@
       </p:pic>
       <p:sp>
         <p:nvSpPr>
-          <p:cNvPr id="4" name="Content Placeholder 3"/>
-          <p:cNvSpPr>
-            <a:spLocks noGrp="1"/>
-          </p:cNvSpPr>
-          <p:nvPr>
-            <p:ph idx="2" sz="half"/>
-          </p:nvPr>
-        </p:nvSpPr>
-        <p:spPr/>
-        <p:txBody>
-          <a:bodyPr/>
-          <a:lstStyle/>
-          <a:p>
-            <a:pPr lvl="0" indent="0">
-              <a:buNone/>
-            </a:pPr>
-            <a:r>
-              <a:rPr>
-                <a:solidFill>
-                  <a:srgbClr val="4758AB"/>
-                </a:solidFill>
-                <a:latin typeface="Courier"/>
-              </a:rPr>
-              <a:t>shapiro.test</a:t>
-            </a:r>
-            <a:r>
-              <a:rPr>
-                <a:solidFill>
-                  <a:srgbClr val="003B4F"/>
-                </a:solidFill>
-                <a:latin typeface="Courier"/>
-              </a:rPr>
-              <a:t>(</a:t>
-            </a:r>
-            <a:r>
-              <a:rPr>
-                <a:solidFill>
-                  <a:srgbClr val="4758AB"/>
-                </a:solidFill>
-                <a:latin typeface="Courier"/>
-              </a:rPr>
-              <a:t>residuals</a:t>
-            </a:r>
-            <a:r>
-              <a:rPr>
-                <a:solidFill>
-                  <a:srgbClr val="003B4F"/>
-                </a:solidFill>
-                <a:latin typeface="Courier"/>
-              </a:rPr>
-              <a:t>(mass_model))</a:t>
-            </a:r>
-          </a:p>
-          <a:p>
-            <a:pPr lvl="0" indent="0">
-              <a:buNone/>
-            </a:pPr>
-            <a:r>
-              <a:rPr>
-                <a:latin typeface="Courier"/>
-              </a:rPr>
-              <a:t>
-    Shapiro-Wilk normality test
-data:  residuals(mass_model)
-W = 0.99166, p-value = 0.05118</a:t>
-            </a:r>
-          </a:p>
-        </p:txBody>
-      </p:sp>
-      <p:sp>
-        <p:nvSpPr>
           <p:cNvPr id="5" name="Text Placeholder 4"/>
           <p:cNvSpPr>
             <a:spLocks noGrp="1"/>
@@ -6739,8 +6669,12 @@
           <a:p>
             <a:pPr lvl="0"/>
             <a:r>
-              <a:rPr/>
-              <a:t>Panel 2 (Normal Q-Q) is the main visual tool; Shapiro-Wilk is a formal companion</a:t>
+              <a:rPr b="1"/>
+              <a:t>Panel 2 (Normal Q-Q)</a:t>
+            </a:r>
+            <a:r>
+              <a:rPr/>
+              <a:t> is the main visual tool</a:t>
             </a:r>
           </a:p>
           <a:p>
@@ -6748,44 +6682,6 @@
             <a:r>
               <a:rPr/>
               <a:t>Panels 1 &amp; 3 double-check equal variance — the same job Levene’s does next, from a different angle</a:t>
-            </a:r>
-          </a:p>
-          <a:p>
-            <a:pPr lvl="0" indent="0" marL="1270000">
-              <a:buNone/>
-            </a:pPr>
-            <a:r>
-              <a:rPr sz="2000" b="1"/>
-              <a:t>Important</a:t>
-            </a:r>
-          </a:p>
-          <a:p>
-            <a:pPr lvl="0" indent="0" marL="1270000">
-              <a:buNone/>
-            </a:pPr>
-            <a:r>
-              <a:rPr sz="2000" b="1"/>
-              <a:t>Large-sample caution:</a:t>
-            </a:r>
-            <a:r>
-              <a:rPr sz="2000"/>
-              <a:t> with ~340 birds, Shapiro-Wilk flags </a:t>
-            </a:r>
-            <a:r>
-              <a:rPr sz="2000" i="1"/>
-              <a:t>tiny</a:t>
-            </a:r>
-            <a:r>
-              <a:rPr sz="2000"/>
-              <a:t> departures as “significant.” Trust the </a:t>
-            </a:r>
-            <a:r>
-              <a:rPr sz="2000" b="1"/>
-              <a:t>Q-Q panel</a:t>
-            </a:r>
-            <a:r>
-              <a:rPr sz="2000"/>
-              <a:t> — if points track the line, you’re fine.</a:t>
             </a:r>
           </a:p>
         </p:txBody>
@@ -7023,8 +6919,11 @@
         <p:spPr>
           <a:xfrm>
             <a:off x="0" y="0"/>
-            <a:ext cx="9144000" cy="582780"/>
+            <a:ext cx="9144000" cy="602780"/>
           </a:xfrm>
+          <a:solidFill>
+            <a:srgbClr val="1A1A2E"/>
+          </a:solidFill>
         </p:spPr>
         <p:txBody>
           <a:bodyPr/>
@@ -7035,7 +6934,7 @@
             </a:pPr>
             <a:r>
               <a:rPr/>
-              <a:t>Assumption 2 — Equal Variance (Levene’s Test)</a:t>
+              <a:t>Normality — Shapiro-Wilk as a Companion</a:t>
             </a:r>
           </a:p>
         </p:txBody>
@@ -7047,7 +6946,7 @@
             <a:spLocks noGrp="1"/>
           </p:cNvSpPr>
           <p:nvPr>
-            <p:ph idx="1"/>
+            <p:ph idx="1" sz="half"/>
           </p:nvPr>
         </p:nvSpPr>
         <p:spPr/>
@@ -7055,12 +6954,115 @@
           <a:bodyPr/>
           <a:lstStyle/>
           <a:p>
+            <a:pPr lvl="0" indent="0">
+              <a:buNone/>
+            </a:pPr>
+            <a:r>
+              <a:rPr>
+                <a:solidFill>
+                  <a:srgbClr val="5E5E5E"/>
+                </a:solidFill>
+                <a:latin typeface="Courier"/>
+              </a:rPr>
+              <a:t># Shapiro-Wilk on the RESIDUALS, not the raw masses ----</a:t>
+            </a:r>
+            <a:br/>
+            <a:r>
+              <a:rPr>
+                <a:solidFill>
+                  <a:srgbClr val="4758AB"/>
+                </a:solidFill>
+                <a:latin typeface="Courier"/>
+              </a:rPr>
+              <a:t>shapiro.test</a:t>
+            </a:r>
+            <a:r>
+              <a:rPr>
+                <a:solidFill>
+                  <a:srgbClr val="003B4F"/>
+                </a:solidFill>
+                <a:latin typeface="Courier"/>
+              </a:rPr>
+              <a:t>(</a:t>
+            </a:r>
+            <a:r>
+              <a:rPr>
+                <a:solidFill>
+                  <a:srgbClr val="4758AB"/>
+                </a:solidFill>
+                <a:latin typeface="Courier"/>
+              </a:rPr>
+              <a:t>residuals</a:t>
+            </a:r>
+            <a:r>
+              <a:rPr>
+                <a:solidFill>
+                  <a:srgbClr val="003B4F"/>
+                </a:solidFill>
+                <a:latin typeface="Courier"/>
+              </a:rPr>
+              <a:t>(mass_model))</a:t>
+            </a:r>
+          </a:p>
+          <a:p>
+            <a:pPr lvl="0" indent="0">
+              <a:buNone/>
+            </a:pPr>
+            <a:r>
+              <a:rPr>
+                <a:latin typeface="Courier"/>
+              </a:rPr>
+              <a:t>
+    Shapiro-Wilk normality test
+data:  residuals(mass_model)
+W = 0.99166, p-value = 0.05118</a:t>
+            </a:r>
+          </a:p>
+        </p:txBody>
+      </p:sp>
+      <p:sp>
+        <p:nvSpPr>
+          <p:cNvPr id="4" name="Content Placeholder 3"/>
+          <p:cNvSpPr>
+            <a:spLocks noGrp="1"/>
+          </p:cNvSpPr>
+          <p:nvPr>
+            <p:ph idx="2" sz="half"/>
+          </p:nvPr>
+        </p:nvSpPr>
+        <p:spPr/>
+        <p:txBody>
+          <a:bodyPr/>
+          <a:lstStyle/>
+          <a:p>
+            <a:pPr lvl="0"/>
+            <a:r>
+              <a:rPr b="1"/>
+              <a:t>H₀:</a:t>
+            </a:r>
+            <a:r>
+              <a:rPr/>
+              <a:t> the residuals are normal</a:t>
+            </a:r>
+          </a:p>
+          <a:p>
+            <a:pPr lvl="0"/>
+            <a:r>
+              <a:rPr i="1"/>
+              <a:t>p</a:t>
+            </a:r>
+            <a:r>
+              <a:rPr/>
+              <a:t> &gt; 0.05 → no evidence against normality</a:t>
+            </a:r>
+          </a:p>
+          <a:p>
             <a:pPr lvl="0" indent="0" marL="1270000">
               <a:buNone/>
             </a:pPr>
             <a:r>
               <a:rPr sz="2000" b="1"/>
-              <a:t>Note</a:t>
+              <a:t>Important</a:t>
             </a:r>
           </a:p>
           <a:p>
@@ -7069,35 +7071,27 @@
             </a:pPr>
             <a:r>
               <a:rPr sz="2000" b="1"/>
-              <a:t>🔮 Predict first:</a:t>
+              <a:t>Large-sample caution:</a:t>
             </a:r>
             <a:r>
               <a:rPr sz="2000"/>
-              <a:t> Look back at the boxplot spreads. Predict — will Levene’s test call the variances </a:t>
+              <a:t> with ~340 birds, Shapiro-Wilk flags </a:t>
+            </a:r>
+            <a:r>
+              <a:rPr sz="2000" i="1"/>
+              <a:t>tiny</a:t>
+            </a:r>
+            <a:r>
+              <a:rPr sz="2000"/>
+              <a:t> departures as “significant.” Trust the </a:t>
             </a:r>
             <a:r>
               <a:rPr sz="2000" b="1"/>
-              <a:t>equal</a:t>
+              <a:t>Q-Q panel</a:t>
             </a:r>
             <a:r>
               <a:rPr sz="2000"/>
-              <a:t> (</a:t>
-            </a:r>
-            <a:r>
-              <a:rPr sz="2000" i="1"/>
-              <a:t>p</a:t>
-            </a:r>
-            <a:r>
-              <a:rPr sz="2000"/>
-              <a:t> &gt; 0.05) or </a:t>
-            </a:r>
-            <a:r>
-              <a:rPr sz="2000" b="1"/>
-              <a:t>unequal</a:t>
-            </a:r>
-            <a:r>
-              <a:rPr sz="2000"/>
-              <a:t>?</a:t>
+              <a:t> — if the points track the line, you’re fine.</a:t>
             </a:r>
           </a:p>
         </p:txBody>
@@ -7126,12 +7120,42 @@
       </p:grpSpPr>
       <p:sp>
         <p:nvSpPr>
+          <p:cNvPr id="2" name="Title 1"/>
+          <p:cNvSpPr>
+            <a:spLocks noGrp="1"/>
+          </p:cNvSpPr>
+          <p:nvPr>
+            <p:ph type="title"/>
+          </p:nvPr>
+        </p:nvSpPr>
+        <p:spPr>
+          <a:xfrm>
+            <a:off x="0" y="0"/>
+            <a:ext cx="9144000" cy="582780"/>
+          </a:xfrm>
+        </p:spPr>
+        <p:txBody>
+          <a:bodyPr/>
+          <a:lstStyle/>
+          <a:p>
+            <a:pPr lvl="0" indent="0" marL="0">
+              <a:buNone/>
+            </a:pPr>
+            <a:r>
+              <a:rPr/>
+              <a:t>Assumption 2 — Equal Variance (Levene’s Test)</a:t>
+            </a:r>
+          </a:p>
+        </p:txBody>
+      </p:sp>
+      <p:sp>
+        <p:nvSpPr>
           <p:cNvPr id="3" name="Content Placeholder 2"/>
           <p:cNvSpPr>
             <a:spLocks noGrp="1"/>
           </p:cNvSpPr>
           <p:nvPr>
-            <p:ph idx="1" sz="half"/>
+            <p:ph idx="1"/>
           </p:nvPr>
         </p:nvSpPr>
         <p:spPr/>
@@ -7139,266 +7163,49 @@
           <a:bodyPr/>
           <a:lstStyle/>
           <a:p>
-            <a:pPr lvl="0" indent="0">
-              <a:buNone/>
-            </a:pPr>
-            <a:r>
-              <a:rPr>
-                <a:solidFill>
-                  <a:srgbClr val="5E5E5E"/>
-                </a:solidFill>
-                <a:latin typeface="Courier"/>
-              </a:rPr>
-              <a:t># Levene's test — H0: all groups have equal variance --</a:t>
-            </a:r>
-            <a:br/>
-            <a:r>
-              <a:rPr>
-                <a:solidFill>
-                  <a:srgbClr val="4758AB"/>
-                </a:solidFill>
-                <a:latin typeface="Courier"/>
-              </a:rPr>
-              <a:t>leveneTest</a:t>
-            </a:r>
-            <a:r>
-              <a:rPr>
-                <a:solidFill>
-                  <a:srgbClr val="003B4F"/>
-                </a:solidFill>
-                <a:latin typeface="Courier"/>
-              </a:rPr>
-              <a:t>(body_mass_g </a:t>
-            </a:r>
-            <a:r>
-              <a:rPr>
-                <a:solidFill>
-                  <a:srgbClr val="5E5E5E"/>
-                </a:solidFill>
-                <a:latin typeface="Courier"/>
-              </a:rPr>
-              <a:t>~</a:t>
-            </a:r>
-            <a:r>
-              <a:rPr>
-                <a:solidFill>
-                  <a:srgbClr val="003B4F"/>
-                </a:solidFill>
-                <a:latin typeface="Courier"/>
-              </a:rPr>
-              <a:t> species, </a:t>
-            </a:r>
-            <a:r>
-              <a:rPr>
-                <a:solidFill>
-                  <a:srgbClr val="657422"/>
-                </a:solidFill>
-                <a:latin typeface="Courier"/>
-              </a:rPr>
-              <a:t>data =</a:t>
-            </a:r>
-            <a:r>
-              <a:rPr>
-                <a:solidFill>
-                  <a:srgbClr val="003B4F"/>
-                </a:solidFill>
-                <a:latin typeface="Courier"/>
-              </a:rPr>
-              <a:t> penguins_df)</a:t>
-            </a:r>
-          </a:p>
-          <a:p>
-            <a:pPr lvl="0" indent="0">
-              <a:buNone/>
-            </a:pPr>
-            <a:r>
-              <a:rPr>
-                <a:latin typeface="Courier"/>
-              </a:rPr>
-              <a:t>Levene's Test for Homogeneity of Variance (center = median)
-       Df F value   Pr(&gt;F)   
-group   2  5.1203 0.006445 **
-      339                    
----
-Signif. codes:  0 '***' 0.001 '**' 0.01 '*' 0.05 '.' 0.1 ' ' 1</a:t>
-            </a:r>
-          </a:p>
-        </p:txBody>
-      </p:sp>
-      <p:sp>
-        <p:nvSpPr>
-          <p:cNvPr id="4" name="Content Placeholder 3"/>
-          <p:cNvSpPr>
-            <a:spLocks noGrp="1"/>
-          </p:cNvSpPr>
-          <p:nvPr>
-            <p:ph idx="2" sz="half"/>
-          </p:nvPr>
-        </p:nvSpPr>
-        <p:spPr/>
-        <p:txBody>
-          <a:bodyPr/>
-          <a:lstStyle/>
-          <a:p>
-            <a:pPr lvl="0"/>
-            <a:r>
-              <a:rPr i="1"/>
+            <a:pPr lvl="0" indent="0" marL="1270000">
+              <a:buNone/>
+            </a:pPr>
+            <a:r>
+              <a:rPr sz="2000" b="1"/>
+              <a:t>Note</a:t>
+            </a:r>
+          </a:p>
+          <a:p>
+            <a:pPr lvl="0" indent="0" marL="1270000">
+              <a:buNone/>
+            </a:pPr>
+            <a:r>
+              <a:rPr sz="2000" b="1"/>
+              <a:t>🔮 Predict first:</a:t>
+            </a:r>
+            <a:r>
+              <a:rPr sz="2000"/>
+              <a:t> Look back at the boxplot spreads. Predict — will Levene’s test call the variances </a:t>
+            </a:r>
+            <a:r>
+              <a:rPr sz="2000" b="1"/>
+              <a:t>equal</a:t>
+            </a:r>
+            <a:r>
+              <a:rPr sz="2000"/>
+              <a:t> (</a:t>
+            </a:r>
+            <a:r>
+              <a:rPr sz="2000" i="1"/>
               <a:t>p</a:t>
             </a:r>
             <a:r>
-              <a:rPr/>
-              <a:t> &gt; 0.05 → variances similar → classic ANOVA is fine</a:t>
-            </a:r>
-          </a:p>
-          <a:p>
-            <a:pPr lvl="0"/>
-            <a:r>
-              <a:rPr i="1"/>
-              <a:t>p</a:t>
-            </a:r>
-            <a:r>
-              <a:rPr/>
-              <a:t> &lt; 0.05 → variances differ → use </a:t>
-            </a:r>
-            <a:r>
-              <a:rPr b="1"/>
-              <a:t>Welch’s ANOVA</a:t>
-            </a:r>
-            <a:r>
-              <a:rPr/>
-              <a:t>:</a:t>
-            </a:r>
-          </a:p>
-          <a:p>
-            <a:pPr lvl="0" indent="0">
-              <a:buNone/>
-            </a:pPr>
-            <a:r>
-              <a:rPr>
-                <a:solidFill>
-                  <a:srgbClr val="4758AB"/>
-                </a:solidFill>
-                <a:latin typeface="Courier"/>
-              </a:rPr>
-              <a:t>oneway.test</a:t>
-            </a:r>
-            <a:r>
-              <a:rPr>
-                <a:solidFill>
-                  <a:srgbClr val="003B4F"/>
-                </a:solidFill>
-                <a:latin typeface="Courier"/>
-              </a:rPr>
-              <a:t>(body_mass_g </a:t>
-            </a:r>
-            <a:r>
-              <a:rPr>
-                <a:solidFill>
-                  <a:srgbClr val="5E5E5E"/>
-                </a:solidFill>
-                <a:latin typeface="Courier"/>
-              </a:rPr>
-              <a:t>~</a:t>
-            </a:r>
-            <a:r>
-              <a:rPr>
-                <a:solidFill>
-                  <a:srgbClr val="003B4F"/>
-                </a:solidFill>
-                <a:latin typeface="Courier"/>
-              </a:rPr>
-              <a:t> species,</a:t>
-            </a:r>
-            <a:br/>
-            <a:r>
-              <a:rPr>
-                <a:solidFill>
-                  <a:srgbClr val="003B4F"/>
-                </a:solidFill>
-                <a:latin typeface="Courier"/>
-              </a:rPr>
-              <a:t>            </a:t>
-            </a:r>
-            <a:r>
-              <a:rPr>
-                <a:solidFill>
-                  <a:srgbClr val="657422"/>
-                </a:solidFill>
-                <a:latin typeface="Courier"/>
-              </a:rPr>
-              <a:t>data =</a:t>
-            </a:r>
-            <a:r>
-              <a:rPr>
-                <a:solidFill>
-                  <a:srgbClr val="003B4F"/>
-                </a:solidFill>
-                <a:latin typeface="Courier"/>
-              </a:rPr>
-              <a:t> penguins_df,</a:t>
-            </a:r>
-            <a:br/>
-            <a:r>
-              <a:rPr>
-                <a:solidFill>
-                  <a:srgbClr val="003B4F"/>
-                </a:solidFill>
-                <a:latin typeface="Courier"/>
-              </a:rPr>
-              <a:t>            </a:t>
-            </a:r>
-            <a:r>
-              <a:rPr>
-                <a:solidFill>
-                  <a:srgbClr val="657422"/>
-                </a:solidFill>
-                <a:latin typeface="Courier"/>
-              </a:rPr>
-              <a:t>var.equal =</a:t>
-            </a:r>
-            <a:r>
-              <a:rPr>
-                <a:solidFill>
-                  <a:srgbClr val="003B4F"/>
-                </a:solidFill>
-                <a:latin typeface="Courier"/>
-              </a:rPr>
-              <a:t> </a:t>
-            </a:r>
-            <a:r>
-              <a:rPr>
-                <a:solidFill>
-                  <a:srgbClr val="8F5902"/>
-                </a:solidFill>
-                <a:latin typeface="Courier"/>
-              </a:rPr>
-              <a:t>FALSE</a:t>
-            </a:r>
-            <a:r>
-              <a:rPr>
-                <a:solidFill>
-                  <a:srgbClr val="003B4F"/>
-                </a:solidFill>
-                <a:latin typeface="Courier"/>
-              </a:rPr>
-              <a:t>)</a:t>
-            </a:r>
-          </a:p>
-          <a:p>
-            <a:pPr lvl="0" indent="0" marL="0">
-              <a:buNone/>
-            </a:pPr>
-            <a:r>
-              <a:rPr/>
-              <a:t>Same spirit as Welch’s </a:t>
-            </a:r>
-            <a:r>
-              <a:rPr b="1"/>
-              <a:t>t</a:t>
-            </a:r>
-            <a:r>
-              <a:rPr/>
-              <a:t>-test — robust when spreads differ.</a:t>
+              <a:rPr sz="2000"/>
+              <a:t> &gt; 0.05) or </a:t>
+            </a:r>
+            <a:r>
+              <a:rPr sz="2000" b="1"/>
+              <a:t>unequal</a:t>
+            </a:r>
+            <a:r>
+              <a:rPr sz="2000"/>
+              <a:t>?</a:t>
             </a:r>
           </a:p>
         </p:txBody>
@@ -7427,75 +7234,279 @@
       </p:grpSpPr>
       <p:sp>
         <p:nvSpPr>
-          <p:cNvPr id="2" name="Title 1"/>
-          <p:cNvSpPr>
-            <a:spLocks noGrp="1"/>
-          </p:cNvSpPr>
-          <p:nvPr>
-            <p:ph type="title"/>
-          </p:nvPr>
-        </p:nvSpPr>
-        <p:spPr>
-          <a:xfrm>
-            <a:off x="0" y="0"/>
-            <a:ext cx="9144000" cy="582780"/>
-          </a:xfrm>
-        </p:spPr>
+          <p:cNvPr id="3" name="Content Placeholder 2"/>
+          <p:cNvSpPr>
+            <a:spLocks noGrp="1"/>
+          </p:cNvSpPr>
+          <p:nvPr>
+            <p:ph idx="1" sz="half"/>
+          </p:nvPr>
+        </p:nvSpPr>
+        <p:spPr/>
         <p:txBody>
           <a:bodyPr/>
           <a:lstStyle/>
           <a:p>
+            <a:pPr lvl="0" indent="0">
+              <a:buNone/>
+            </a:pPr>
+            <a:r>
+              <a:rPr>
+                <a:solidFill>
+                  <a:srgbClr val="5E5E5E"/>
+                </a:solidFill>
+                <a:latin typeface="Courier"/>
+              </a:rPr>
+              <a:t># Levene's test — H0: all groups have equal variance --</a:t>
+            </a:r>
+            <a:br/>
+            <a:r>
+              <a:rPr>
+                <a:solidFill>
+                  <a:srgbClr val="4758AB"/>
+                </a:solidFill>
+                <a:latin typeface="Courier"/>
+              </a:rPr>
+              <a:t>leveneTest</a:t>
+            </a:r>
+            <a:r>
+              <a:rPr>
+                <a:solidFill>
+                  <a:srgbClr val="003B4F"/>
+                </a:solidFill>
+                <a:latin typeface="Courier"/>
+              </a:rPr>
+              <a:t>(body_mass_g </a:t>
+            </a:r>
+            <a:r>
+              <a:rPr>
+                <a:solidFill>
+                  <a:srgbClr val="5E5E5E"/>
+                </a:solidFill>
+                <a:latin typeface="Courier"/>
+              </a:rPr>
+              <a:t>~</a:t>
+            </a:r>
+            <a:r>
+              <a:rPr>
+                <a:solidFill>
+                  <a:srgbClr val="003B4F"/>
+                </a:solidFill>
+                <a:latin typeface="Courier"/>
+              </a:rPr>
+              <a:t> species, </a:t>
+            </a:r>
+            <a:r>
+              <a:rPr>
+                <a:solidFill>
+                  <a:srgbClr val="657422"/>
+                </a:solidFill>
+                <a:latin typeface="Courier"/>
+              </a:rPr>
+              <a:t>data =</a:t>
+            </a:r>
+            <a:r>
+              <a:rPr>
+                <a:solidFill>
+                  <a:srgbClr val="003B4F"/>
+                </a:solidFill>
+                <a:latin typeface="Courier"/>
+              </a:rPr>
+              <a:t> penguins_df)</a:t>
+            </a:r>
+          </a:p>
+          <a:p>
+            <a:pPr lvl="0" indent="0">
+              <a:buNone/>
+            </a:pPr>
+            <a:r>
+              <a:rPr>
+                <a:latin typeface="Courier"/>
+              </a:rPr>
+              <a:t>Levene's Test for Homogeneity of Variance (center = median)
+       Df F value   Pr(&gt;F)   
+group   2  5.1203 0.006445 **
+      339                    
+---
+Signif. codes:  0 '***' 0.001 '**' 0.01 '*' 0.05 '.' 0.1 ' ' 1</a:t>
+            </a:r>
+          </a:p>
+        </p:txBody>
+      </p:sp>
+      <p:sp>
+        <p:nvSpPr>
+          <p:cNvPr id="4" name="Content Placeholder 3"/>
+          <p:cNvSpPr>
+            <a:spLocks noGrp="1"/>
+          </p:cNvSpPr>
+          <p:nvPr>
+            <p:ph idx="2" sz="half"/>
+          </p:nvPr>
+        </p:nvSpPr>
+        <p:spPr/>
+        <p:txBody>
+          <a:bodyPr/>
+          <a:lstStyle/>
+          <a:p>
+            <a:pPr lvl="0"/>
+            <a:r>
+              <a:rPr i="1"/>
+              <a:t>p</a:t>
+            </a:r>
+            <a:r>
+              <a:rPr/>
+              <a:t> &gt; 0.05 → variances similar → classic ANOVA is fine</a:t>
+            </a:r>
+          </a:p>
+          <a:p>
+            <a:pPr lvl="0"/>
+            <a:r>
+              <a:rPr i="1"/>
+              <a:t>p</a:t>
+            </a:r>
+            <a:r>
+              <a:rPr/>
+              <a:t> &lt; 0.05 → variances differ → use </a:t>
+            </a:r>
+            <a:r>
+              <a:rPr b="1"/>
+              <a:t>Welch’s ANOVA</a:t>
+            </a:r>
+            <a:r>
+              <a:rPr/>
+              <a:t>:</a:t>
+            </a:r>
+          </a:p>
+          <a:p>
+            <a:pPr lvl="0" indent="0">
+              <a:buNone/>
+            </a:pPr>
+            <a:r>
+              <a:rPr>
+                <a:solidFill>
+                  <a:srgbClr val="4758AB"/>
+                </a:solidFill>
+                <a:latin typeface="Courier"/>
+              </a:rPr>
+              <a:t>oneway.test</a:t>
+            </a:r>
+            <a:r>
+              <a:rPr>
+                <a:solidFill>
+                  <a:srgbClr val="003B4F"/>
+                </a:solidFill>
+                <a:latin typeface="Courier"/>
+              </a:rPr>
+              <a:t>(body_mass_g </a:t>
+            </a:r>
+            <a:r>
+              <a:rPr>
+                <a:solidFill>
+                  <a:srgbClr val="5E5E5E"/>
+                </a:solidFill>
+                <a:latin typeface="Courier"/>
+              </a:rPr>
+              <a:t>~</a:t>
+            </a:r>
+            <a:r>
+              <a:rPr>
+                <a:solidFill>
+                  <a:srgbClr val="003B4F"/>
+                </a:solidFill>
+                <a:latin typeface="Courier"/>
+              </a:rPr>
+              <a:t> species,</a:t>
+            </a:r>
+            <a:br/>
+            <a:r>
+              <a:rPr>
+                <a:solidFill>
+                  <a:srgbClr val="003B4F"/>
+                </a:solidFill>
+                <a:latin typeface="Courier"/>
+              </a:rPr>
+              <a:t>            </a:t>
+            </a:r>
+            <a:r>
+              <a:rPr>
+                <a:solidFill>
+                  <a:srgbClr val="657422"/>
+                </a:solidFill>
+                <a:latin typeface="Courier"/>
+              </a:rPr>
+              <a:t>data =</a:t>
+            </a:r>
+            <a:r>
+              <a:rPr>
+                <a:solidFill>
+                  <a:srgbClr val="003B4F"/>
+                </a:solidFill>
+                <a:latin typeface="Courier"/>
+              </a:rPr>
+              <a:t> penguins_df,</a:t>
+            </a:r>
+            <a:br/>
+            <a:r>
+              <a:rPr>
+                <a:solidFill>
+                  <a:srgbClr val="003B4F"/>
+                </a:solidFill>
+                <a:latin typeface="Courier"/>
+              </a:rPr>
+              <a:t>            </a:t>
+            </a:r>
+            <a:r>
+              <a:rPr>
+                <a:solidFill>
+                  <a:srgbClr val="657422"/>
+                </a:solidFill>
+                <a:latin typeface="Courier"/>
+              </a:rPr>
+              <a:t>var.equal =</a:t>
+            </a:r>
+            <a:r>
+              <a:rPr>
+                <a:solidFill>
+                  <a:srgbClr val="003B4F"/>
+                </a:solidFill>
+                <a:latin typeface="Courier"/>
+              </a:rPr>
+              <a:t> </a:t>
+            </a:r>
+            <a:r>
+              <a:rPr>
+                <a:solidFill>
+                  <a:srgbClr val="8F5902"/>
+                </a:solidFill>
+                <a:latin typeface="Courier"/>
+              </a:rPr>
+              <a:t>FALSE</a:t>
+            </a:r>
+            <a:r>
+              <a:rPr>
+                <a:solidFill>
+                  <a:srgbClr val="003B4F"/>
+                </a:solidFill>
+                <a:latin typeface="Courier"/>
+              </a:rPr>
+              <a:t>)</a:t>
+            </a:r>
+          </a:p>
+          <a:p>
             <a:pPr lvl="0" indent="0" marL="0">
               <a:buNone/>
             </a:pPr>
             <a:r>
               <a:rPr/>
-              <a:t>🛑 Pause — Do Activity Parts 5–8 Now</a:t>
-            </a:r>
-          </a:p>
-        </p:txBody>
-      </p:sp>
-      <p:sp>
-        <p:nvSpPr>
-          <p:cNvPr id="3" name="Content Placeholder 2"/>
-          <p:cNvSpPr>
-            <a:spLocks noGrp="1"/>
-          </p:cNvSpPr>
-          <p:nvPr>
-            <p:ph idx="1"/>
-          </p:nvPr>
-        </p:nvSpPr>
-        <p:spPr/>
-        <p:txBody>
-          <a:bodyPr/>
-          <a:lstStyle/>
-          <a:p>
-            <a:pPr lvl="0" indent="0" marL="0">
-              <a:buNone/>
-            </a:pPr>
-            <a:r>
-              <a:rPr/>
-              <a:t>Fit </a:t>
-            </a:r>
-            <a:r>
-              <a:rPr>
-                <a:latin typeface="Courier"/>
-              </a:rPr>
-              <a:t>lm(body_mass_g ~ species)</a:t>
-            </a:r>
-            <a:r>
-              <a:rPr/>
-              <a:t>, set the reference level with </a:t>
-            </a:r>
-            <a:r>
-              <a:rPr>
-                <a:latin typeface="Courier"/>
-              </a:rPr>
-              <a:t>fct_relevel()</a:t>
-            </a:r>
-            <a:r>
-              <a:rPr/>
-              <a:t>, check the residual QQ plot + Shapiro, and run Levene’s test. Predict each result before you run it.</a:t>
+              <a:t>Same spirit as Welch’s </a:t>
+            </a:r>
+            <a:r>
+              <a:rPr b="1"/>
+              <a:t>t</a:t>
+            </a:r>
+            <a:r>
+              <a:rPr/>
+              <a:t>-test — robust when spreads differ.</a:t>
             </a:r>
           </a:p>
         </p:txBody>
@@ -7535,6 +7546,103 @@
         <p:spPr>
           <a:xfrm>
             <a:off x="0" y="0"/>
+            <a:ext cx="9144000" cy="582780"/>
+          </a:xfrm>
+        </p:spPr>
+        <p:txBody>
+          <a:bodyPr/>
+          <a:lstStyle/>
+          <a:p>
+            <a:pPr lvl="0" indent="0" marL="0">
+              <a:buNone/>
+            </a:pPr>
+            <a:r>
+              <a:rPr/>
+              <a:t>🛑 Pause — Do Activity Parts 5–8 Now</a:t>
+            </a:r>
+          </a:p>
+        </p:txBody>
+      </p:sp>
+      <p:sp>
+        <p:nvSpPr>
+          <p:cNvPr id="3" name="Content Placeholder 2"/>
+          <p:cNvSpPr>
+            <a:spLocks noGrp="1"/>
+          </p:cNvSpPr>
+          <p:nvPr>
+            <p:ph idx="1"/>
+          </p:nvPr>
+        </p:nvSpPr>
+        <p:spPr/>
+        <p:txBody>
+          <a:bodyPr/>
+          <a:lstStyle/>
+          <a:p>
+            <a:pPr lvl="0" indent="0" marL="0">
+              <a:buNone/>
+            </a:pPr>
+            <a:r>
+              <a:rPr/>
+              <a:t>Fit </a:t>
+            </a:r>
+            <a:r>
+              <a:rPr>
+                <a:latin typeface="Courier"/>
+              </a:rPr>
+              <a:t>lm(body_mass_g ~ species)</a:t>
+            </a:r>
+            <a:r>
+              <a:rPr/>
+              <a:t>, set the reference level with </a:t>
+            </a:r>
+            <a:r>
+              <a:rPr>
+                <a:latin typeface="Courier"/>
+              </a:rPr>
+              <a:t>fct_relevel()</a:t>
+            </a:r>
+            <a:r>
+              <a:rPr/>
+              <a:t>, check the residual QQ plot + Shapiro, and run Levene’s test. Predict each result before you run it.</a:t>
+            </a:r>
+          </a:p>
+        </p:txBody>
+      </p:sp>
+    </p:spTree>
+  </p:cSld>
+</p:sld>
+</file>
+
+<file path=ppt/slides/slide24.xml><?xml version="1.0" encoding="utf-8"?>
+<p:sld xmlns:a="http://schemas.openxmlformats.org/drawingml/2006/main" xmlns:r="http://schemas.openxmlformats.org/officeDocument/2006/relationships" xmlns:p="http://schemas.openxmlformats.org/presentationml/2006/main">
+  <p:cSld>
+    <p:spTree>
+      <p:nvGrpSpPr>
+        <p:cNvPr id="1" name=""/>
+        <p:cNvGrpSpPr/>
+        <p:nvPr/>
+      </p:nvGrpSpPr>
+      <p:grpSpPr>
+        <a:xfrm>
+          <a:off x="0" y="0"/>
+          <a:ext cx="0" cy="0"/>
+          <a:chOff x="0" y="0"/>
+          <a:chExt cx="0" cy="0"/>
+        </a:xfrm>
+      </p:grpSpPr>
+      <p:sp>
+        <p:nvSpPr>
+          <p:cNvPr id="2" name="Title 1"/>
+          <p:cNvSpPr>
+            <a:spLocks noGrp="1"/>
+          </p:cNvSpPr>
+          <p:nvPr>
+            <p:ph type="title"/>
+          </p:nvPr>
+        </p:nvSpPr>
+        <p:spPr>
+          <a:xfrm>
+            <a:off x="0" y="0"/>
             <a:ext cx="9144000" cy="602780"/>
           </a:xfrm>
           <a:solidFill>
@@ -8354,15 +8462,7 @@
             <a:pPr lvl="0"/>
             <a:r>
               <a:rPr sz="2000"/>
-              <a:t>With three groups instead of two, it is tempting to just read off which box in the plot looks tallest. Committing to a prediction about the F-statistic </a:t>
-            </a:r>
-            <a:r>
-              <a:rPr sz="2000" i="1"/>
-              <a:t>before</a:t>
-            </a:r>
-            <a:r>
-              <a:rPr sz="2000"/>
-              <a:t> you see it forces you to reason about between- vs. within-group variance instead of eyeballing a boxplot.</a:t>
+              <a:t>With three groups it is tempting to just read off the tallest box. Predicting the F-statistic first makes you reason about between- vs. within-group variance.</a:t>
             </a:r>
           </a:p>
           <a:p>
@@ -8389,14 +8489,14 @@
             </a:r>
             <a:r>
               <a:rPr sz="2000"/>
-              <a:t> is what makes you notice it’s there — paste the line and you’ll never ask why it matters for unbalanced groups.</a:t>
+              <a:t> is what makes you notice it is there.</a:t>
             </a:r>
           </a:p>
           <a:p>
             <a:pPr lvl="0"/>
             <a:r>
               <a:rPr sz="2000"/>
-              <a:t>Practicing each assumption check right after it’s introduced keeps normality-of-residuals and Levene’s test tied to </a:t>
+              <a:t>Checking each assumption right after it is introduced keeps it tied to </a:t>
             </a:r>
             <a:r>
               <a:rPr sz="2000" i="1"/>
@@ -8404,7 +8504,7 @@
             </a:r>
             <a:r>
               <a:rPr sz="2000"/>
-              <a:t> penguin model instead of turning into two more disconnected rules to memorize.</a:t>
+              <a:t> penguin model, not two more rules to memorize.</a:t>
             </a:r>
           </a:p>
         </p:txBody>

--- a/docs/content/one_way_anova/one_way_anova_lecture.pptx
+++ b/docs/content/one_way_anova/one_way_anova_lecture.pptx
@@ -3363,7 +3363,7 @@
             </a:pPr>
             <a:r>
               <a:rPr/>
-              <a:t>2026-10-05</a:t>
+              <a:t>2026-10-08</a:t>
             </a:r>
           </a:p>
         </p:txBody>

--- a/docs/content/one_way_anova/one_way_anova_lecture.pptx
+++ b/docs/content/one_way_anova/one_way_anova_lecture.pptx
@@ -3363,7 +3363,7 @@
             </a:pPr>
             <a:r>
               <a:rPr/>
-              <a:t>2026-10-08</a:t>
+              <a:t>2026-10-09</a:t>
             </a:r>
           </a:p>
         </p:txBody>

--- a/docs/content/one_way_anova/one_way_anova_lecture.pptx
+++ b/docs/content/one_way_anova/one_way_anova_lecture.pptx
@@ -3370,7 +3370,7 @@
             </a:pPr>
             <a:r>
               <a:rPr/>
-              <a:t>2026-10-19</a:t>
+              <a:t>2026-10-22</a:t>
             </a:r>
           </a:p>
         </p:txBody>
